--- a/GFFゲーム提出用/企画書・説明書.pptx
+++ b/GFFゲーム提出用/企画書・説明書.pptx
@@ -275,7 +275,7 @@
           <a:p>
             <a:fld id="{98A1212E-A3E8-4986-81A3-717C3FFFA444}" type="datetimeFigureOut">
               <a:rPr kumimoji="1" lang="ja-JP" altLang="en-US" smtClean="0"/>
-              <a:t>2026/1/6</a:t>
+              <a:t>2026/2/11</a:t>
             </a:fld>
             <a:endParaRPr kumimoji="1" lang="ja-JP" altLang="en-US"/>
           </a:p>
@@ -505,7 +505,7 @@
           <a:p>
             <a:fld id="{98A1212E-A3E8-4986-81A3-717C3FFFA444}" type="datetimeFigureOut">
               <a:rPr kumimoji="1" lang="ja-JP" altLang="en-US" smtClean="0"/>
-              <a:t>2026/1/6</a:t>
+              <a:t>2026/2/11</a:t>
             </a:fld>
             <a:endParaRPr kumimoji="1" lang="ja-JP" altLang="en-US"/>
           </a:p>
@@ -745,7 +745,7 @@
           <a:p>
             <a:fld id="{98A1212E-A3E8-4986-81A3-717C3FFFA444}" type="datetimeFigureOut">
               <a:rPr kumimoji="1" lang="ja-JP" altLang="en-US" smtClean="0"/>
-              <a:t>2026/1/6</a:t>
+              <a:t>2026/2/11</a:t>
             </a:fld>
             <a:endParaRPr kumimoji="1" lang="ja-JP" altLang="en-US"/>
           </a:p>
@@ -975,7 +975,7 @@
           <a:p>
             <a:fld id="{98A1212E-A3E8-4986-81A3-717C3FFFA444}" type="datetimeFigureOut">
               <a:rPr kumimoji="1" lang="ja-JP" altLang="en-US" smtClean="0"/>
-              <a:t>2026/1/6</a:t>
+              <a:t>2026/2/11</a:t>
             </a:fld>
             <a:endParaRPr kumimoji="1" lang="ja-JP" altLang="en-US"/>
           </a:p>
@@ -1250,7 +1250,7 @@
           <a:p>
             <a:fld id="{98A1212E-A3E8-4986-81A3-717C3FFFA444}" type="datetimeFigureOut">
               <a:rPr kumimoji="1" lang="ja-JP" altLang="en-US" smtClean="0"/>
-              <a:t>2026/1/6</a:t>
+              <a:t>2026/2/11</a:t>
             </a:fld>
             <a:endParaRPr kumimoji="1" lang="ja-JP" altLang="en-US"/>
           </a:p>
@@ -1579,7 +1579,7 @@
           <a:p>
             <a:fld id="{98A1212E-A3E8-4986-81A3-717C3FFFA444}" type="datetimeFigureOut">
               <a:rPr kumimoji="1" lang="ja-JP" altLang="en-US" smtClean="0"/>
-              <a:t>2026/1/6</a:t>
+              <a:t>2026/2/11</a:t>
             </a:fld>
             <a:endParaRPr kumimoji="1" lang="ja-JP" altLang="en-US"/>
           </a:p>
@@ -2055,7 +2055,7 @@
           <a:p>
             <a:fld id="{98A1212E-A3E8-4986-81A3-717C3FFFA444}" type="datetimeFigureOut">
               <a:rPr kumimoji="1" lang="ja-JP" altLang="en-US" smtClean="0"/>
-              <a:t>2026/1/6</a:t>
+              <a:t>2026/2/11</a:t>
             </a:fld>
             <a:endParaRPr kumimoji="1" lang="ja-JP" altLang="en-US"/>
           </a:p>
@@ -2196,7 +2196,7 @@
           <a:p>
             <a:fld id="{98A1212E-A3E8-4986-81A3-717C3FFFA444}" type="datetimeFigureOut">
               <a:rPr kumimoji="1" lang="ja-JP" altLang="en-US" smtClean="0"/>
-              <a:t>2026/1/6</a:t>
+              <a:t>2026/2/11</a:t>
             </a:fld>
             <a:endParaRPr kumimoji="1" lang="ja-JP" altLang="en-US"/>
           </a:p>
@@ -2309,7 +2309,7 @@
           <a:p>
             <a:fld id="{98A1212E-A3E8-4986-81A3-717C3FFFA444}" type="datetimeFigureOut">
               <a:rPr kumimoji="1" lang="ja-JP" altLang="en-US" smtClean="0"/>
-              <a:t>2026/1/6</a:t>
+              <a:t>2026/2/11</a:t>
             </a:fld>
             <a:endParaRPr kumimoji="1" lang="ja-JP" altLang="en-US"/>
           </a:p>
@@ -2652,7 +2652,7 @@
           <a:p>
             <a:fld id="{98A1212E-A3E8-4986-81A3-717C3FFFA444}" type="datetimeFigureOut">
               <a:rPr kumimoji="1" lang="ja-JP" altLang="en-US" smtClean="0"/>
-              <a:t>2026/1/6</a:t>
+              <a:t>2026/2/11</a:t>
             </a:fld>
             <a:endParaRPr kumimoji="1" lang="ja-JP" altLang="en-US"/>
           </a:p>
@@ -2940,7 +2940,7 @@
           <a:p>
             <a:fld id="{98A1212E-A3E8-4986-81A3-717C3FFFA444}" type="datetimeFigureOut">
               <a:rPr kumimoji="1" lang="ja-JP" altLang="en-US" smtClean="0"/>
-              <a:t>2026/1/6</a:t>
+              <a:t>2026/2/11</a:t>
             </a:fld>
             <a:endParaRPr kumimoji="1" lang="ja-JP" altLang="en-US"/>
           </a:p>
@@ -3222,7 +3222,7 @@
           <a:p>
             <a:fld id="{98A1212E-A3E8-4986-81A3-717C3FFFA444}" type="datetimeFigureOut">
               <a:rPr kumimoji="1" lang="ja-JP" altLang="en-US" smtClean="0"/>
-              <a:t>2026/1/6</a:t>
+              <a:t>2026/2/11</a:t>
             </a:fld>
             <a:endParaRPr kumimoji="1" lang="ja-JP" altLang="en-US"/>
           </a:p>
@@ -4111,10 +4111,10 @@
       </p:sp>
       <p:pic>
         <p:nvPicPr>
-          <p:cNvPr id="32" name="図 31">
-            <a:extLst>
-              <a:ext uri="{FF2B5EF4-FFF2-40B4-BE49-F238E27FC236}">
-                <a16:creationId xmlns:a16="http://schemas.microsoft.com/office/drawing/2014/main" id="{4FD06721-80DA-4266-BB78-E7BD698C3E10}"/>
+          <p:cNvPr id="6" name="図 5" descr="食品 が含まれている画像&#10;&#10;AI 生成コンテンツは誤りを含む可能性があります。">
+            <a:extLst>
+              <a:ext uri="{FF2B5EF4-FFF2-40B4-BE49-F238E27FC236}">
+                <a16:creationId xmlns:a16="http://schemas.microsoft.com/office/drawing/2014/main" id="{2D39CD4D-2B65-BED3-3705-5F41C1616FB5}"/>
               </a:ext>
             </a:extLst>
           </p:cNvPr>
@@ -4137,8 +4137,8 @@
         </p:blipFill>
         <p:spPr>
           <a:xfrm>
-            <a:off x="7840063" y="4030308"/>
-            <a:ext cx="1572881" cy="1813120"/>
+            <a:off x="1015765" y="3371010"/>
+            <a:ext cx="2386002" cy="2386002"/>
           </a:xfrm>
           <a:prstGeom prst="rect">
             <a:avLst/>
@@ -4147,10 +4147,10 @@
       </p:pic>
       <p:pic>
         <p:nvPicPr>
-          <p:cNvPr id="6" name="図 5" descr="食品 が含まれている画像&#10;&#10;AI 生成コンテンツは誤りを含む可能性があります。">
-            <a:extLst>
-              <a:ext uri="{FF2B5EF4-FFF2-40B4-BE49-F238E27FC236}">
-                <a16:creationId xmlns:a16="http://schemas.microsoft.com/office/drawing/2014/main" id="{2D39CD4D-2B65-BED3-3705-5F41C1616FB5}"/>
+          <p:cNvPr id="13" name="図 12" descr="写真, 座る, 建物, 古い が含まれている画像&#10;&#10;AI 生成コンテンツは誤りを含む可能性があります。">
+            <a:extLst>
+              <a:ext uri="{FF2B5EF4-FFF2-40B4-BE49-F238E27FC236}">
+                <a16:creationId xmlns:a16="http://schemas.microsoft.com/office/drawing/2014/main" id="{C9A4DAD9-4C2C-9A8A-9E7D-282ECB13D9BC}"/>
               </a:ext>
             </a:extLst>
           </p:cNvPr>
@@ -4173,114 +4173,6 @@
         </p:blipFill>
         <p:spPr>
           <a:xfrm>
-            <a:off x="1015765" y="3371010"/>
-            <a:ext cx="2386002" cy="2386002"/>
-          </a:xfrm>
-          <a:prstGeom prst="rect">
-            <a:avLst/>
-          </a:prstGeom>
-        </p:spPr>
-      </p:pic>
-      <p:pic>
-        <p:nvPicPr>
-          <p:cNvPr id="10" name="図 9" descr="時計 が含まれている画像&#10;&#10;AI 生成コンテンツは誤りを含む可能性があります。">
-            <a:extLst>
-              <a:ext uri="{FF2B5EF4-FFF2-40B4-BE49-F238E27FC236}">
-                <a16:creationId xmlns:a16="http://schemas.microsoft.com/office/drawing/2014/main" id="{417AF6C8-F33F-09A9-99D1-45A4308A77CE}"/>
-              </a:ext>
-            </a:extLst>
-          </p:cNvPr>
-          <p:cNvPicPr>
-            <a:picLocks noChangeAspect="1"/>
-          </p:cNvPicPr>
-          <p:nvPr/>
-        </p:nvPicPr>
-        <p:blipFill>
-          <a:blip r:embed="rId4">
-            <a:extLst>
-              <a:ext uri="{28A0092B-C50C-407E-A947-70E740481C1C}">
-                <a14:useLocalDpi xmlns:a14="http://schemas.microsoft.com/office/drawing/2010/main" val="0"/>
-              </a:ext>
-            </a:extLst>
-          </a:blip>
-          <a:stretch>
-            <a:fillRect/>
-          </a:stretch>
-        </p:blipFill>
-        <p:spPr>
-          <a:xfrm>
-            <a:off x="2388921" y="3278776"/>
-            <a:ext cx="2123542" cy="2386002"/>
-          </a:xfrm>
-          <a:prstGeom prst="rect">
-            <a:avLst/>
-          </a:prstGeom>
-        </p:spPr>
-      </p:pic>
-      <p:pic>
-        <p:nvPicPr>
-          <p:cNvPr id="11" name="図 10">
-            <a:extLst>
-              <a:ext uri="{FF2B5EF4-FFF2-40B4-BE49-F238E27FC236}">
-                <a16:creationId xmlns:a16="http://schemas.microsoft.com/office/drawing/2014/main" id="{65532AF7-1C74-392A-4BD8-A9A81A87AF12}"/>
-              </a:ext>
-            </a:extLst>
-          </p:cNvPr>
-          <p:cNvPicPr>
-            <a:picLocks noChangeAspect="1"/>
-          </p:cNvPicPr>
-          <p:nvPr/>
-        </p:nvPicPr>
-        <p:blipFill>
-          <a:blip r:embed="rId5">
-            <a:extLst>
-              <a:ext uri="{28A0092B-C50C-407E-A947-70E740481C1C}">
-                <a14:useLocalDpi xmlns:a14="http://schemas.microsoft.com/office/drawing/2010/main" val="0"/>
-              </a:ext>
-            </a:extLst>
-          </a:blip>
-          <a:stretch>
-            <a:fillRect/>
-          </a:stretch>
-        </p:blipFill>
-        <p:spPr>
-          <a:xfrm>
-            <a:off x="9444267" y="3908832"/>
-            <a:ext cx="1928183" cy="1928183"/>
-          </a:xfrm>
-          <a:prstGeom prst="rect">
-            <a:avLst/>
-          </a:prstGeom>
-        </p:spPr>
-      </p:pic>
-      <p:pic>
-        <p:nvPicPr>
-          <p:cNvPr id="13" name="図 12" descr="写真, 座る, 建物, 古い が含まれている画像&#10;&#10;AI 生成コンテンツは誤りを含む可能性があります。">
-            <a:extLst>
-              <a:ext uri="{FF2B5EF4-FFF2-40B4-BE49-F238E27FC236}">
-                <a16:creationId xmlns:a16="http://schemas.microsoft.com/office/drawing/2014/main" id="{C9A4DAD9-4C2C-9A8A-9E7D-282ECB13D9BC}"/>
-              </a:ext>
-            </a:extLst>
-          </p:cNvPr>
-          <p:cNvPicPr>
-            <a:picLocks noChangeAspect="1"/>
-          </p:cNvPicPr>
-          <p:nvPr/>
-        </p:nvPicPr>
-        <p:blipFill>
-          <a:blip r:embed="rId6">
-            <a:extLst>
-              <a:ext uri="{28A0092B-C50C-407E-A947-70E740481C1C}">
-                <a14:useLocalDpi xmlns:a14="http://schemas.microsoft.com/office/drawing/2010/main" val="0"/>
-              </a:ext>
-            </a:extLst>
-          </a:blip>
-          <a:stretch>
-            <a:fillRect/>
-          </a:stretch>
-        </p:blipFill>
-        <p:spPr>
-          <a:xfrm>
             <a:off x="8771561" y="3122207"/>
             <a:ext cx="952500" cy="952500"/>
           </a:xfrm>
@@ -4304,7 +4196,7 @@
           <p:nvPr/>
         </p:nvPicPr>
         <p:blipFill>
-          <a:blip r:embed="rId6">
+          <a:blip r:embed="rId3">
             <a:extLst>
               <a:ext uri="{28A0092B-C50C-407E-A947-70E740481C1C}">
                 <a14:useLocalDpi xmlns:a14="http://schemas.microsoft.com/office/drawing/2010/main" val="0"/>
@@ -4457,6 +4349,114 @@
           </a:p>
         </p:txBody>
       </p:sp>
+      <p:pic>
+        <p:nvPicPr>
+          <p:cNvPr id="4" name="図 3">
+            <a:extLst>
+              <a:ext uri="{FF2B5EF4-FFF2-40B4-BE49-F238E27FC236}">
+                <a16:creationId xmlns:a16="http://schemas.microsoft.com/office/drawing/2014/main" id="{87497669-0500-C547-83F1-C88881F8D0F7}"/>
+              </a:ext>
+            </a:extLst>
+          </p:cNvPr>
+          <p:cNvPicPr>
+            <a:picLocks noChangeAspect="1"/>
+          </p:cNvPicPr>
+          <p:nvPr/>
+        </p:nvPicPr>
+        <p:blipFill>
+          <a:blip r:embed="rId4">
+            <a:extLst>
+              <a:ext uri="{28A0092B-C50C-407E-A947-70E740481C1C}">
+                <a14:useLocalDpi xmlns:a14="http://schemas.microsoft.com/office/drawing/2010/main" val="0"/>
+              </a:ext>
+            </a:extLst>
+          </a:blip>
+          <a:stretch>
+            <a:fillRect/>
+          </a:stretch>
+        </p:blipFill>
+        <p:spPr>
+          <a:xfrm flipH="1">
+            <a:off x="9845859" y="3402029"/>
+            <a:ext cx="1533333" cy="2657143"/>
+          </a:xfrm>
+          <a:prstGeom prst="rect">
+            <a:avLst/>
+          </a:prstGeom>
+        </p:spPr>
+      </p:pic>
+      <p:pic>
+        <p:nvPicPr>
+          <p:cNvPr id="9" name="図 8" descr="ゲームのキャラクター&#10;&#10;AI 生成コンテンツは誤りを含む可能性があります。">
+            <a:extLst>
+              <a:ext uri="{FF2B5EF4-FFF2-40B4-BE49-F238E27FC236}">
+                <a16:creationId xmlns:a16="http://schemas.microsoft.com/office/drawing/2014/main" id="{F96B3A79-181E-7417-5118-DD979479FEB1}"/>
+              </a:ext>
+            </a:extLst>
+          </p:cNvPr>
+          <p:cNvPicPr>
+            <a:picLocks noChangeAspect="1"/>
+          </p:cNvPicPr>
+          <p:nvPr/>
+        </p:nvPicPr>
+        <p:blipFill>
+          <a:blip r:embed="rId5">
+            <a:extLst>
+              <a:ext uri="{28A0092B-C50C-407E-A947-70E740481C1C}">
+                <a14:useLocalDpi xmlns:a14="http://schemas.microsoft.com/office/drawing/2010/main" val="0"/>
+              </a:ext>
+            </a:extLst>
+          </a:blip>
+          <a:stretch>
+            <a:fillRect/>
+          </a:stretch>
+        </p:blipFill>
+        <p:spPr>
+          <a:xfrm flipH="1">
+            <a:off x="8001505" y="3896690"/>
+            <a:ext cx="2015983" cy="2481797"/>
+          </a:xfrm>
+          <a:prstGeom prst="rect">
+            <a:avLst/>
+          </a:prstGeom>
+        </p:spPr>
+      </p:pic>
+      <p:pic>
+        <p:nvPicPr>
+          <p:cNvPr id="19" name="図 18" descr="黒い背景に白い文字がある&#10;&#10;AI 生成コンテンツは誤りを含む可能性があります。">
+            <a:extLst>
+              <a:ext uri="{FF2B5EF4-FFF2-40B4-BE49-F238E27FC236}">
+                <a16:creationId xmlns:a16="http://schemas.microsoft.com/office/drawing/2014/main" id="{F2351D54-9BA3-444D-C3B1-3AC72D998B04}"/>
+              </a:ext>
+            </a:extLst>
+          </p:cNvPr>
+          <p:cNvPicPr>
+            <a:picLocks noChangeAspect="1"/>
+          </p:cNvPicPr>
+          <p:nvPr/>
+        </p:nvPicPr>
+        <p:blipFill>
+          <a:blip r:embed="rId6">
+            <a:extLst>
+              <a:ext uri="{28A0092B-C50C-407E-A947-70E740481C1C}">
+                <a14:useLocalDpi xmlns:a14="http://schemas.microsoft.com/office/drawing/2010/main" val="0"/>
+              </a:ext>
+            </a:extLst>
+          </a:blip>
+          <a:stretch>
+            <a:fillRect/>
+          </a:stretch>
+        </p:blipFill>
+        <p:spPr>
+          <a:xfrm>
+            <a:off x="2942108" y="3064492"/>
+            <a:ext cx="1833183" cy="2787296"/>
+          </a:xfrm>
+          <a:prstGeom prst="rect">
+            <a:avLst/>
+          </a:prstGeom>
+        </p:spPr>
+      </p:pic>
     </p:spTree>
     <p:extLst>
       <p:ext uri="{BB962C8B-B14F-4D97-AF65-F5344CB8AC3E}">
@@ -6356,202 +6356,6 @@
               </a:rPr>
               <a:t>プレイヤー</a:t>
             </a:r>
-          </a:p>
-        </p:txBody>
-      </p:sp>
-      <p:sp>
-        <p:nvSpPr>
-          <p:cNvPr id="23" name="正方形/長方形 22">
-            <a:extLst>
-              <a:ext uri="{FF2B5EF4-FFF2-40B4-BE49-F238E27FC236}">
-                <a16:creationId xmlns:a16="http://schemas.microsoft.com/office/drawing/2014/main" id="{0B6367A8-CE00-47C7-B251-0B4A99358CFE}"/>
-              </a:ext>
-            </a:extLst>
-          </p:cNvPr>
-          <p:cNvSpPr/>
-          <p:nvPr/>
-        </p:nvSpPr>
-        <p:spPr>
-          <a:xfrm>
-            <a:off x="303940" y="4936478"/>
-            <a:ext cx="2863153" cy="1026569"/>
-          </a:xfrm>
-          <a:prstGeom prst="rect">
-            <a:avLst/>
-          </a:prstGeom>
-          <a:solidFill>
-            <a:schemeClr val="bg1"/>
-          </a:solidFill>
-          <a:ln>
-            <a:solidFill>
-              <a:schemeClr val="tx1"/>
-            </a:solidFill>
-          </a:ln>
-        </p:spPr>
-        <p:style>
-          <a:lnRef idx="2">
-            <a:schemeClr val="accent1">
-              <a:shade val="50000"/>
-            </a:schemeClr>
-          </a:lnRef>
-          <a:fillRef idx="1">
-            <a:schemeClr val="accent1"/>
-          </a:fillRef>
-          <a:effectRef idx="0">
-            <a:schemeClr val="accent1"/>
-          </a:effectRef>
-          <a:fontRef idx="minor">
-            <a:schemeClr val="lt1"/>
-          </a:fontRef>
-        </p:style>
-        <p:txBody>
-          <a:bodyPr rtlCol="0" anchor="ctr"/>
-          <a:lstStyle/>
-          <a:p>
-            <a:pPr algn="ctr"/>
-            <a:endParaRPr kumimoji="1" lang="ja-JP" altLang="en-US"/>
-          </a:p>
-        </p:txBody>
-      </p:sp>
-      <p:sp>
-        <p:nvSpPr>
-          <p:cNvPr id="24" name="正方形/長方形 23">
-            <a:extLst>
-              <a:ext uri="{FF2B5EF4-FFF2-40B4-BE49-F238E27FC236}">
-                <a16:creationId xmlns:a16="http://schemas.microsoft.com/office/drawing/2014/main" id="{DDCA598A-BAFC-4DBD-887B-4566B34654C8}"/>
-              </a:ext>
-            </a:extLst>
-          </p:cNvPr>
-          <p:cNvSpPr/>
-          <p:nvPr/>
-        </p:nvSpPr>
-        <p:spPr>
-          <a:xfrm>
-            <a:off x="756568" y="4736518"/>
-            <a:ext cx="1631063" cy="414734"/>
-          </a:xfrm>
-          <a:prstGeom prst="rect">
-            <a:avLst/>
-          </a:prstGeom>
-          <a:solidFill>
-            <a:schemeClr val="accent4"/>
-          </a:solidFill>
-          <a:ln w="28575">
-            <a:solidFill>
-              <a:schemeClr val="accent2"/>
-            </a:solidFill>
-          </a:ln>
-        </p:spPr>
-        <p:style>
-          <a:lnRef idx="2">
-            <a:schemeClr val="accent1">
-              <a:shade val="50000"/>
-            </a:schemeClr>
-          </a:lnRef>
-          <a:fillRef idx="1">
-            <a:schemeClr val="accent1"/>
-          </a:fillRef>
-          <a:effectRef idx="0">
-            <a:schemeClr val="accent1"/>
-          </a:effectRef>
-          <a:fontRef idx="minor">
-            <a:schemeClr val="lt1"/>
-          </a:fontRef>
-        </p:style>
-        <p:txBody>
-          <a:bodyPr rtlCol="0" anchor="ctr"/>
-          <a:lstStyle/>
-          <a:p>
-            <a:pPr algn="ctr"/>
-            <a:r>
-              <a:rPr lang="ja-JP" altLang="en-US" dirty="0">
-                <a:solidFill>
-                  <a:schemeClr val="tx1"/>
-                </a:solidFill>
-                <a:latin typeface="HGP創英角ｺﾞｼｯｸUB" panose="020B0900000000000000" pitchFamily="50" charset="-128"/>
-                <a:ea typeface="HGP創英角ｺﾞｼｯｸUB" panose="020B0900000000000000" pitchFamily="50" charset="-128"/>
-              </a:rPr>
-              <a:t>お宝</a:t>
-            </a:r>
-            <a:r>
-              <a:rPr kumimoji="1" lang="ja-JP" altLang="en-US" dirty="0">
-                <a:solidFill>
-                  <a:schemeClr val="tx1"/>
-                </a:solidFill>
-                <a:latin typeface="HGP創英角ｺﾞｼｯｸUB" panose="020B0900000000000000" pitchFamily="50" charset="-128"/>
-                <a:ea typeface="HGP創英角ｺﾞｼｯｸUB" panose="020B0900000000000000" pitchFamily="50" charset="-128"/>
-              </a:rPr>
-              <a:t>スロット</a:t>
-            </a:r>
-          </a:p>
-        </p:txBody>
-      </p:sp>
-      <p:sp>
-        <p:nvSpPr>
-          <p:cNvPr id="25" name="テキスト ボックス 24">
-            <a:extLst>
-              <a:ext uri="{FF2B5EF4-FFF2-40B4-BE49-F238E27FC236}">
-                <a16:creationId xmlns:a16="http://schemas.microsoft.com/office/drawing/2014/main" id="{93833ADD-125C-4FDD-8667-E176202C45DF}"/>
-              </a:ext>
-            </a:extLst>
-          </p:cNvPr>
-          <p:cNvSpPr txBox="1"/>
-          <p:nvPr/>
-        </p:nvSpPr>
-        <p:spPr>
-          <a:xfrm>
-            <a:off x="431588" y="5163694"/>
-            <a:ext cx="2673927" cy="646331"/>
-          </a:xfrm>
-          <a:prstGeom prst="rect">
-            <a:avLst/>
-          </a:prstGeom>
-          <a:noFill/>
-        </p:spPr>
-        <p:txBody>
-          <a:bodyPr wrap="square" rtlCol="0">
-            <a:spAutoFit/>
-          </a:bodyPr>
-          <a:lstStyle/>
-          <a:p>
-            <a:r>
-              <a:rPr lang="ja-JP" altLang="en-US" dirty="0">
-                <a:latin typeface="BIZ UD明朝 Medium" panose="02020500000000000000" pitchFamily="17" charset="-128"/>
-                <a:ea typeface="BIZ UD明朝 Medium" panose="02020500000000000000" pitchFamily="17" charset="-128"/>
-              </a:rPr>
-              <a:t>使うお宝を選ぶことができ</a:t>
-            </a:r>
-            <a:r>
-              <a:rPr lang="en-US" altLang="ja-JP" dirty="0">
-                <a:solidFill>
-                  <a:srgbClr val="FF0000"/>
-                </a:solidFill>
-                <a:latin typeface="BIZ UD明朝 Medium" panose="02020500000000000000" pitchFamily="17" charset="-128"/>
-                <a:ea typeface="BIZ UD明朝 Medium" panose="02020500000000000000" pitchFamily="17" charset="-128"/>
-              </a:rPr>
-              <a:t>3</a:t>
-            </a:r>
-            <a:r>
-              <a:rPr lang="ja-JP" altLang="en-US" dirty="0">
-                <a:solidFill>
-                  <a:srgbClr val="FF0000"/>
-                </a:solidFill>
-                <a:latin typeface="BIZ UD明朝 Medium" panose="02020500000000000000" pitchFamily="17" charset="-128"/>
-                <a:ea typeface="BIZ UD明朝 Medium" panose="02020500000000000000" pitchFamily="17" charset="-128"/>
-              </a:rPr>
-              <a:t>つまで保管</a:t>
-            </a:r>
-            <a:r>
-              <a:rPr lang="ja-JP" altLang="en-US" dirty="0">
-                <a:latin typeface="BIZ UD明朝 Medium" panose="02020500000000000000" pitchFamily="17" charset="-128"/>
-                <a:ea typeface="BIZ UD明朝 Medium" panose="02020500000000000000" pitchFamily="17" charset="-128"/>
-              </a:rPr>
-              <a:t>できる。</a:t>
-            </a:r>
-            <a:endParaRPr kumimoji="1" lang="ja-JP" altLang="en-US" dirty="0">
-              <a:latin typeface="BIZ UD明朝 Medium" panose="02020500000000000000" pitchFamily="17" charset="-128"/>
-              <a:ea typeface="BIZ UD明朝 Medium" panose="02020500000000000000" pitchFamily="17" charset="-128"/>
-            </a:endParaRPr>
           </a:p>
         </p:txBody>
       </p:sp>
